--- a/dist/초5/수학/도형과측정/초5_수학_도형과측정_02_합동인도형.pptx
+++ b/dist/초5/수학/도형과측정/초5_수학_도형과측정_02_합동인도형.pptx
@@ -119,45 +119,45 @@
   <p:extLst>
     <p:ext uri="{521415D9-36F7-43E2-AB2F-B90AF26B5E84}">
       <p14:sectionLst xmlns:p14="http://schemas.microsoft.com/office/powerpoint/2010/main">
-        <p14:section name="도입" id="{49e80677-9f5c-1e10-e73a-ecec6c5f1275}">
+        <p14:section name="도입" id="{d7accefd-b278-b29b-a081-7f81c7e8eb76}">
           <p14:sldIdLst>
             <p14:sldId id="256"/>
             <p14:sldId id="257"/>
           </p14:sldIdLst>
         </p14:section>
-        <p14:section name="개념" id="{cf70b4f9-d19a-0795-4548-44d22e87e4bd}">
+        <p14:section name="개념" id="{b4f3a93c-7ab0-ee76-8bdc-a7fa5bfb48cb}">
           <p14:sldIdLst>
             <p14:sldId id="258"/>
             <p14:sldId id="261"/>
             <p14:sldId id="262"/>
           </p14:sldIdLst>
         </p14:section>
-        <p14:section name="연습" id="{01dba392-8c53-fe5d-15d5-c263e358cce7}">
+        <p14:section name="연습" id="{fe91cae8-61de-b171-419c-5d2f62eca46e}">
           <p14:sldIdLst>
             <p14:sldId id="259"/>
             <p14:sldId id="260"/>
             <p14:sldId id="263"/>
           </p14:sldIdLst>
         </p14:section>
-        <p14:section name="개념" id="{bb728f62-cb34-d698-40c0-a1b04448c745}">
+        <p14:section name="개념" id="{40363298-8ffd-b697-787e-8bf9a4296edc}">
           <p14:sldIdLst/>
         </p14:section>
-        <p14:section name="연습" id="{aef5d1da-6729-e024-375e-64238a1d426c}">
+        <p14:section name="연습" id="{255e8a62-d1e8-1dea-9650-6d9c2d25337f}">
           <p14:sldIdLst/>
         </p14:section>
-        <p14:section name="확인" id="{605f9911-c728-6c4e-ea1f-93e0b88c726a}">
+        <p14:section name="확인" id="{e07ea464-0a88-8831-4c4c-22574c34702d}">
           <p14:sldIdLst>
             <p14:sldId id="264"/>
             <p14:sldId id="265"/>
             <p14:sldId id="266"/>
           </p14:sldIdLst>
         </p14:section>
-        <p14:section name="정리" id="{2aaeb7c2-342c-4bbe-0cf7-6127444a434e}">
+        <p14:section name="정리" id="{8b908aa0-368b-f864-9030-a28db37c03b2}">
           <p14:sldIdLst>
             <p14:sldId id="267"/>
           </p14:sldIdLst>
         </p14:section>
-        <p14:section name="보충" id="{0a8aaf40-95dd-73cc-d64c-fa463cb622e1}">
+        <p14:section name="보충" id="{42e625be-5efd-9f3c-1bea-566649bddc50}">
           <p14:sldIdLst>
             <p14:sldId id="268"/>
           </p14:sldIdLst>
@@ -7247,7 +7247,7 @@
         </p:nvSpPr>
         <p:spPr>
           <a:xfrm>
-            <a:off x="9059861" y="2762315"/>
+            <a:off x="9012446" y="2809730"/>
             <a:ext cx="483108" cy="476250"/>
           </a:xfrm>
           <a:prstGeom prst="rect">
@@ -12015,7 +12015,7 @@
         </p:nvSpPr>
         <p:spPr>
           <a:xfrm>
-            <a:off x="1160500" y="4004534"/>
+            <a:off x="1102428" y="4038061"/>
             <a:ext cx="483108" cy="476250"/>
           </a:xfrm>
           <a:prstGeom prst="rect">
@@ -12054,7 +12054,7 @@
         </p:nvSpPr>
         <p:spPr>
           <a:xfrm>
-            <a:off x="4857121" y="3965938"/>
+            <a:off x="4920483" y="3987887"/>
             <a:ext cx="483108" cy="476250"/>
           </a:xfrm>
           <a:prstGeom prst="rect">
@@ -12093,7 +12093,7 @@
         </p:nvSpPr>
         <p:spPr>
           <a:xfrm>
-            <a:off x="2340533" y="1891532"/>
+            <a:off x="2327860" y="1825684"/>
             <a:ext cx="483108" cy="476250"/>
           </a:xfrm>
           <a:prstGeom prst="rect">
@@ -12632,7 +12632,7 @@
         </p:nvSpPr>
         <p:spPr>
           <a:xfrm>
-            <a:off x="9365311" y="4112266"/>
+            <a:off x="9377984" y="4178114"/>
             <a:ext cx="483108" cy="476250"/>
           </a:xfrm>
           <a:prstGeom prst="rect">
@@ -12671,7 +12671,7 @@
         </p:nvSpPr>
         <p:spPr>
           <a:xfrm>
-            <a:off x="10545344" y="1999264"/>
+            <a:off x="10603416" y="1965737"/>
             <a:ext cx="483108" cy="476250"/>
           </a:xfrm>
           <a:prstGeom prst="rect">
@@ -12710,7 +12710,7 @@
         </p:nvSpPr>
         <p:spPr>
           <a:xfrm>
-            <a:off x="6848723" y="2037860"/>
+            <a:off x="6785361" y="2015911"/>
             <a:ext cx="483108" cy="476250"/>
           </a:xfrm>
           <a:prstGeom prst="rect">
@@ -13483,7 +13483,7 @@
         </p:nvSpPr>
         <p:spPr>
           <a:xfrm>
-            <a:off x="1160500" y="3832068"/>
+            <a:off x="1102428" y="3865595"/>
             <a:ext cx="483108" cy="476250"/>
           </a:xfrm>
           <a:prstGeom prst="rect">
@@ -13522,7 +13522,7 @@
         </p:nvSpPr>
         <p:spPr>
           <a:xfrm>
-            <a:off x="4857121" y="3793472"/>
+            <a:off x="4920483" y="3815421"/>
             <a:ext cx="483108" cy="476250"/>
           </a:xfrm>
           <a:prstGeom prst="rect">
@@ -13561,7 +13561,7 @@
         </p:nvSpPr>
         <p:spPr>
           <a:xfrm>
-            <a:off x="2340533" y="1719066"/>
+            <a:off x="2327860" y="1653218"/>
             <a:ext cx="483108" cy="476250"/>
           </a:xfrm>
           <a:prstGeom prst="rect">
@@ -14042,7 +14042,7 @@
         </p:nvSpPr>
         <p:spPr>
           <a:xfrm>
-            <a:off x="9365311" y="3939800"/>
+            <a:off x="9377984" y="4005648"/>
             <a:ext cx="483108" cy="476250"/>
           </a:xfrm>
           <a:prstGeom prst="rect">
@@ -14081,7 +14081,7 @@
         </p:nvSpPr>
         <p:spPr>
           <a:xfrm>
-            <a:off x="10545344" y="1826798"/>
+            <a:off x="10603416" y="1793271"/>
             <a:ext cx="483108" cy="476250"/>
           </a:xfrm>
           <a:prstGeom prst="rect">
@@ -14120,7 +14120,7 @@
         </p:nvSpPr>
         <p:spPr>
           <a:xfrm>
-            <a:off x="6848723" y="1865394"/>
+            <a:off x="6785361" y="1843445"/>
             <a:ext cx="483108" cy="476250"/>
           </a:xfrm>
           <a:prstGeom prst="rect">
@@ -14914,7 +14914,7 @@
         </p:nvSpPr>
         <p:spPr>
           <a:xfrm>
-            <a:off x="794740" y="4310878"/>
+            <a:off x="736668" y="4344406"/>
             <a:ext cx="483108" cy="476250"/>
           </a:xfrm>
           <a:prstGeom prst="rect">
@@ -14953,7 +14953,7 @@
         </p:nvSpPr>
         <p:spPr>
           <a:xfrm>
-            <a:off x="5169727" y="4357170"/>
+            <a:off x="5217142" y="4404586"/>
             <a:ext cx="483108" cy="476250"/>
           </a:xfrm>
           <a:prstGeom prst="rect">
@@ -14992,7 +14992,7 @@
         </p:nvSpPr>
         <p:spPr>
           <a:xfrm>
-            <a:off x="5169727" y="2298900"/>
+            <a:off x="5217142" y="2251484"/>
             <a:ext cx="483108" cy="476250"/>
           </a:xfrm>
           <a:prstGeom prst="rect">
@@ -15031,7 +15031,7 @@
         </p:nvSpPr>
         <p:spPr>
           <a:xfrm>
-            <a:off x="1882394" y="2263378"/>
+            <a:off x="1848866" y="2205306"/>
             <a:ext cx="483108" cy="476250"/>
           </a:xfrm>
           <a:prstGeom prst="rect">
@@ -15418,7 +15418,7 @@
         </p:nvSpPr>
         <p:spPr>
           <a:xfrm>
-            <a:off x="6500596" y="2345192"/>
+            <a:off x="6442524" y="2311664"/>
             <a:ext cx="483108" cy="476250"/>
           </a:xfrm>
           <a:prstGeom prst="rect">
@@ -15457,7 +15457,7 @@
         </p:nvSpPr>
         <p:spPr>
           <a:xfrm>
-            <a:off x="10875583" y="2298900"/>
+            <a:off x="10922998" y="2251484"/>
             <a:ext cx="483108" cy="476250"/>
           </a:xfrm>
           <a:prstGeom prst="rect">
@@ -15496,7 +15496,7 @@
         </p:nvSpPr>
         <p:spPr>
           <a:xfrm>
-            <a:off x="10875583" y="4357170"/>
+            <a:off x="10922998" y="4404586"/>
             <a:ext cx="483108" cy="476250"/>
           </a:xfrm>
           <a:prstGeom prst="rect">
@@ -15535,7 +15535,7 @@
         </p:nvSpPr>
         <p:spPr>
           <a:xfrm>
-            <a:off x="7588250" y="4392692"/>
+            <a:off x="7554722" y="4450764"/>
             <a:ext cx="483108" cy="476250"/>
           </a:xfrm>
           <a:prstGeom prst="rect">
@@ -16366,7 +16366,7 @@
         </p:nvSpPr>
         <p:spPr>
           <a:xfrm>
-            <a:off x="1747538" y="3954524"/>
+            <a:off x="1684526" y="3977458"/>
             <a:ext cx="483108" cy="476250"/>
           </a:xfrm>
           <a:prstGeom prst="rect">
@@ -16405,7 +16405,7 @@
         </p:nvSpPr>
         <p:spPr>
           <a:xfrm>
-            <a:off x="4219741" y="4014145"/>
+            <a:off x="4272940" y="4054966"/>
             <a:ext cx="483108" cy="476250"/>
           </a:xfrm>
           <a:prstGeom prst="rect">
@@ -16444,7 +16444,7 @@
         </p:nvSpPr>
         <p:spPr>
           <a:xfrm>
-            <a:off x="3726918" y="2236652"/>
+            <a:off x="3747082" y="2172699"/>
             <a:ext cx="483108" cy="476250"/>
           </a:xfrm>
           <a:prstGeom prst="rect">
@@ -16855,7 +16855,7 @@
         </p:nvSpPr>
         <p:spPr>
           <a:xfrm>
-            <a:off x="9633149" y="3890875"/>
+            <a:off x="9697102" y="3911039"/>
             <a:ext cx="483108" cy="476250"/>
           </a:xfrm>
           <a:prstGeom prst="rect">
@@ -16894,7 +16894,7 @@
         </p:nvSpPr>
         <p:spPr>
           <a:xfrm>
-            <a:off x="7915277" y="1911495"/>
+            <a:off x="7892343" y="1848483"/>
             <a:ext cx="483108" cy="476250"/>
           </a:xfrm>
           <a:prstGeom prst="rect">
@@ -16933,7 +16933,7 @@
         </p:nvSpPr>
         <p:spPr>
           <a:xfrm>
-            <a:off x="7855656" y="4383698"/>
+            <a:off x="7814835" y="4436897"/>
             <a:ext cx="483108" cy="476250"/>
           </a:xfrm>
           <a:prstGeom prst="rect">
